--- a/reports/reporte_churn.pptx
+++ b/reports/reporte_churn.pptx
@@ -142,6 +142,11 @@
       </a:defRPr>
     </a:lvl9pPr>
   </p:defaultTextStyle>
+  <p:extLst>
+    <p:ext uri="{EFAFB233-063F-42B5-8137-9DF3F51BA10A}">
+      <p15:sldGuideLst xmlns:p15="http://schemas.microsoft.com/office/powerpoint/2012/main"/>
+    </p:ext>
+  </p:extLst>
 </p:presentation>
 </file>
 
@@ -251,7 +256,7 @@
           <a:p>
             <a:fld id="{7F80A333-B53B-43D2-866C-6AC8D9FBC91E}" type="datetimeFigureOut">
               <a:rPr lang="en-US" smtClean="0"/>
-              <a:t>5/23/2025</a:t>
+              <a:t>5/26/2025</a:t>
             </a:fld>
             <a:endParaRPr lang="en-US"/>
           </a:p>
@@ -432,7 +437,7 @@
           <a:p>
             <a:fld id="{6793CDBA-3E72-454F-A5D6-18ADA9DE96F4}" type="datetimeFigureOut">
               <a:rPr lang="en-US" smtClean="0"/>
-              <a:t>5/23/2025</a:t>
+              <a:t>5/26/2025</a:t>
             </a:fld>
             <a:endParaRPr lang="en-US"/>
           </a:p>
@@ -850,7 +855,7 @@
           <a:p>
             <a:fld id="{70F03649-174C-4688-813D-CB400FDD8C79}" type="datetime1">
               <a:rPr lang="en-US" smtClean="0"/>
-              <a:t>5/23/2025</a:t>
+              <a:t>5/26/2025</a:t>
             </a:fld>
             <a:endParaRPr lang="en-US"/>
           </a:p>
@@ -1051,7 +1056,7 @@
           <a:p>
             <a:fld id="{6E514D7D-CB4D-4F7F-9B5B-F9842C064DB5}" type="datetime1">
               <a:rPr lang="en-US" smtClean="0"/>
-              <a:t>5/23/2025</a:t>
+              <a:t>5/26/2025</a:t>
             </a:fld>
             <a:endParaRPr lang="en-US"/>
           </a:p>
@@ -1262,7 +1267,7 @@
           <a:p>
             <a:fld id="{AD92AB31-7C03-458C-BB8E-EEBC6E099B0D}" type="datetime1">
               <a:rPr lang="en-US" smtClean="0"/>
-              <a:t>5/23/2025</a:t>
+              <a:t>5/26/2025</a:t>
             </a:fld>
             <a:endParaRPr lang="en-US"/>
           </a:p>
@@ -1463,7 +1468,7 @@
           <a:p>
             <a:fld id="{11E62C94-66CF-4B43-8A79-9494E21226CD}" type="datetime1">
               <a:rPr lang="en-US" smtClean="0"/>
-              <a:t>5/23/2025</a:t>
+              <a:t>5/26/2025</a:t>
             </a:fld>
             <a:endParaRPr lang="en-US"/>
           </a:p>
@@ -1741,7 +1746,7 @@
           <a:p>
             <a:fld id="{6D554C61-C284-40CF-9DFD-40DB911BFE32}" type="datetime1">
               <a:rPr lang="en-US" smtClean="0"/>
-              <a:t>5/23/2025</a:t>
+              <a:t>5/26/2025</a:t>
             </a:fld>
             <a:endParaRPr lang="en-US"/>
           </a:p>
@@ -2009,7 +2014,7 @@
           <a:p>
             <a:fld id="{6C69B2F0-2957-46C1-BB65-C8AA72214299}" type="datetime1">
               <a:rPr lang="en-US" smtClean="0"/>
-              <a:t>5/23/2025</a:t>
+              <a:t>5/26/2025</a:t>
             </a:fld>
             <a:endParaRPr lang="en-US"/>
           </a:p>
@@ -2424,7 +2429,7 @@
           <a:p>
             <a:fld id="{183E1F1A-6F2F-454D-9860-2982D9AB2F66}" type="datetime1">
               <a:rPr lang="en-US" smtClean="0"/>
-              <a:t>5/23/2025</a:t>
+              <a:t>5/26/2025</a:t>
             </a:fld>
             <a:endParaRPr lang="en-US"/>
           </a:p>
@@ -2568,7 +2573,7 @@
           <a:p>
             <a:fld id="{5E2E81A6-A3B2-43A1-B4FC-523E68E1C6A9}" type="datetime1">
               <a:rPr lang="en-US" smtClean="0"/>
-              <a:t>5/23/2025</a:t>
+              <a:t>5/26/2025</a:t>
             </a:fld>
             <a:endParaRPr lang="en-US"/>
           </a:p>
@@ -2684,7 +2689,7 @@
           <a:p>
             <a:fld id="{96B33FDC-0D0A-44D6-9E9E-7AA788EBB855}" type="datetime1">
               <a:rPr lang="en-US" smtClean="0"/>
-              <a:t>5/23/2025</a:t>
+              <a:t>5/26/2025</a:t>
             </a:fld>
             <a:endParaRPr lang="en-US"/>
           </a:p>
@@ -2998,7 +3003,7 @@
           <a:p>
             <a:fld id="{7F2F8DFD-6989-4A18-B0B3-5689A1046C01}" type="datetime1">
               <a:rPr lang="en-US" smtClean="0"/>
-              <a:t>5/23/2025</a:t>
+              <a:t>5/26/2025</a:t>
             </a:fld>
             <a:endParaRPr lang="en-US"/>
           </a:p>
@@ -3289,7 +3294,7 @@
           <a:p>
             <a:fld id="{ADBF52B8-D779-4074-8771-59A16307B8C9}" type="datetime1">
               <a:rPr lang="en-US" smtClean="0"/>
-              <a:t>5/23/2025</a:t>
+              <a:t>5/26/2025</a:t>
             </a:fld>
             <a:endParaRPr lang="en-US"/>
           </a:p>
@@ -3533,7 +3538,7 @@
           <a:p>
             <a:fld id="{EAE6F292-E338-4477-AF36-CC4C7DB09396}" type="datetime1">
               <a:rPr lang="en-US" smtClean="0"/>
-              <a:t>5/23/2025</a:t>
+              <a:t>5/26/2025</a:t>
             </a:fld>
             <a:endParaRPr lang="en-US"/>
           </a:p>
@@ -5035,10 +5040,9 @@
           <a:lstStyle/>
           <a:p>
             <a:r>
-              <a:rPr lang="es-419" sz="4000" b="1" dirty="0"/>
-              <a:t>Tasa de abandono del servicio de Fibra Óptica</a:t>
-            </a:r>
-            <a:endParaRPr lang="en-US" sz="4000" b="1" dirty="0"/>
+              <a:rPr lang="es-ES" sz="4000" b="1" dirty="0"/>
+              <a:t>Fibra Óptica: foco crítico en la retención de clientes</a:t>
+            </a:r>
           </a:p>
         </p:txBody>
       </p:sp>
@@ -5133,7 +5137,7 @@
         <p:spPr>
           <a:xfrm>
             <a:off x="7046752" y="2055814"/>
-            <a:ext cx="4613945" cy="3539430"/>
+            <a:ext cx="4613945" cy="3046988"/>
           </a:xfrm>
           <a:prstGeom prst="rect">
             <a:avLst/>
@@ -5145,12 +5149,6 @@
             <a:spAutoFit/>
           </a:bodyPr>
           <a:lstStyle/>
-          <a:p>
-            <a:r>
-              <a:rPr lang="es-ES" sz="1600" b="1" dirty="0"/>
-              <a:t>Fibra Óptica: foco crítico en la retención de clientes</a:t>
-            </a:r>
-          </a:p>
           <a:p>
             <a:pPr marL="285750" indent="-285750">
               <a:buFont typeface="Arial" panose="020B0604020202020204" pitchFamily="34" charset="0"/>
@@ -5630,7 +5628,7 @@
             <a:pPr algn="ctr"/>
             <a:r>
               <a:rPr lang="es-419" b="1" dirty="0"/>
-              <a:t>Cantidad de Servicios contratados</a:t>
+              <a:t>Cantidad de servicios contratados</a:t>
             </a:r>
             <a:endParaRPr lang="en-US" b="1" dirty="0"/>
           </a:p>
@@ -5903,7 +5901,7 @@
           <a:p>
             <a:r>
               <a:rPr lang="es-419" sz="4000" b="1" dirty="0"/>
-              <a:t>Tasa de abandono según Cantidad de servicios contratados</a:t>
+              <a:t>Tasa de abandono según cantidad de servicios contratados</a:t>
             </a:r>
             <a:endParaRPr lang="en-US" sz="4000" b="1" dirty="0"/>
           </a:p>
@@ -8669,7 +8667,7 @@
             <a:pPr algn="ctr"/>
             <a:r>
               <a:rPr lang="es-419" b="1" dirty="0"/>
-              <a:t>Condición de familiar</a:t>
+              <a:t>Condición familiar</a:t>
             </a:r>
           </a:p>
           <a:p>
@@ -9343,14 +9341,7 @@
             <a:pPr algn="ctr"/>
             <a:r>
               <a:rPr lang="es-419" sz="4000" b="1" dirty="0"/>
-              <a:t>Tasa de abandono de clientes con Pareja o Personas a cargo según servicio de </a:t>
-            </a:r>
-          </a:p>
-          <a:p>
-            <a:pPr algn="ctr"/>
-            <a:r>
-              <a:rPr lang="es-419" sz="4000" b="1" dirty="0"/>
-              <a:t>Múltiples Líneas</a:t>
+              <a:t>Tasa de abandono según condición familiar y Múltiples Líneas</a:t>
             </a:r>
             <a:endParaRPr lang="en-US" sz="4000" b="1" dirty="0"/>
           </a:p>
@@ -11725,7 +11716,7 @@
         </p:blipFill>
         <p:spPr>
           <a:xfrm>
-            <a:off x="7117979" y="5143700"/>
+            <a:off x="8061121" y="5143699"/>
             <a:ext cx="1035421" cy="792226"/>
           </a:xfrm>
           <a:prstGeom prst="rect">
@@ -11747,7 +11738,7 @@
         </p:nvSpPr>
         <p:spPr>
           <a:xfrm>
-            <a:off x="6979641" y="5355147"/>
+            <a:off x="7895439" y="5355147"/>
             <a:ext cx="2919368" cy="369332"/>
           </a:xfrm>
           <a:prstGeom prst="rect">

--- a/reports/reporte_churn.pptx
+++ b/reports/reporte_churn.pptx
@@ -6218,7 +6218,7 @@
             <a:pPr algn="ctr"/>
             <a:r>
               <a:rPr lang="es-419" b="1" dirty="0"/>
-              <a:t>Tipo de contrato (Contract)</a:t>
+              <a:t>Tipo de Contrato (Contract)</a:t>
             </a:r>
             <a:endParaRPr lang="en-US" b="1" dirty="0"/>
           </a:p>
@@ -8667,7 +8667,7 @@
             <a:pPr algn="ctr"/>
             <a:r>
               <a:rPr lang="es-419" b="1" dirty="0"/>
-              <a:t>Condición familiar</a:t>
+              <a:t>Condición Familiar</a:t>
             </a:r>
           </a:p>
           <a:p>
@@ -8948,7 +8948,7 @@
           <a:p>
             <a:r>
               <a:rPr lang="es-419" sz="4000" b="1" dirty="0"/>
-              <a:t>Tasa de abandono según condición familiar</a:t>
+              <a:t>Tasa de abandono según Condición Familiar</a:t>
             </a:r>
             <a:endParaRPr lang="en-US" sz="4000" b="1" dirty="0"/>
           </a:p>
@@ -9341,7 +9341,7 @@
             <a:pPr algn="ctr"/>
             <a:r>
               <a:rPr lang="es-419" sz="4000" b="1" dirty="0"/>
-              <a:t>Tasa de abandono según condición familiar y Múltiples Líneas</a:t>
+              <a:t>Tasa de abandono según Condición Familiar y Múltiples Líneas</a:t>
             </a:r>
             <a:endParaRPr lang="en-US" sz="4000" b="1" dirty="0"/>
           </a:p>

--- a/reports/reporte_churn.pptx
+++ b/reports/reporte_churn.pptx
@@ -6489,7 +6489,7 @@
           <a:p>
             <a:r>
               <a:rPr lang="es-419" sz="4000" b="1" dirty="0"/>
-              <a:t>Tasa de abandono según Tipo de Contrato</a:t>
+              <a:t>Contratos mensuales: 4 veces más riesgo de abandono</a:t>
             </a:r>
             <a:endParaRPr lang="en-US" sz="4000" b="1" dirty="0"/>
           </a:p>
